--- a/Traffic-Simulator.pptx
+++ b/Traffic-Simulator.pptx
@@ -6,7 +6,8 @@
   </p:sldMasterIdLst>
   <p:sldIdLst>
     <p:sldId id="256" r:id="rId2"/>
-    <p:sldId id="257" r:id="rId3"/>
+    <p:sldId id="258" r:id="rId3"/>
+    <p:sldId id="257" r:id="rId4"/>
   </p:sldIdLst>
   <p:sldSz cx="12192000" cy="6858000"/>
   <p:notesSz cx="6858000" cy="9144000"/>
@@ -105,6 +106,11 @@
       </a:defRPr>
     </a:lvl9pPr>
   </p:defaultTextStyle>
+  <p:extLst>
+    <p:ext uri="{EFAFB233-063F-42B5-8137-9DF3F51BA10A}">
+      <p15:sldGuideLst xmlns:p15="http://schemas.microsoft.com/office/powerpoint/2012/main"/>
+    </p:ext>
+  </p:extLst>
 </p:presentation>
 </file>
 
@@ -527,7 +533,7 @@
           <a:p>
             <a:fld id="{D4F53BF9-51A7-479A-9F82-F12307D0B401}" type="datetimeFigureOut">
               <a:rPr lang="en-US" smtClean="0"/>
-              <a:t>10/27/2026</a:t>
+              <a:t>10/29/2026</a:t>
             </a:fld>
             <a:endParaRPr lang="en-US"/>
           </a:p>
@@ -852,7 +858,7 @@
           <a:p>
             <a:fld id="{D4F53BF9-51A7-479A-9F82-F12307D0B401}" type="datetimeFigureOut">
               <a:rPr lang="en-US" smtClean="0"/>
-              <a:t>10/27/2026</a:t>
+              <a:t>10/29/2026</a:t>
             </a:fld>
             <a:endParaRPr lang="en-US"/>
           </a:p>
@@ -1111,7 +1117,7 @@
           <a:p>
             <a:fld id="{D4F53BF9-51A7-479A-9F82-F12307D0B401}" type="datetimeFigureOut">
               <a:rPr lang="en-US" smtClean="0"/>
-              <a:t>10/27/2026</a:t>
+              <a:t>10/29/2026</a:t>
             </a:fld>
             <a:endParaRPr lang="en-US"/>
           </a:p>
@@ -1376,7 +1382,7 @@
           <a:p>
             <a:fld id="{D4F53BF9-51A7-479A-9F82-F12307D0B401}" type="datetimeFigureOut">
               <a:rPr lang="en-US" smtClean="0"/>
-              <a:t>10/27/2026</a:t>
+              <a:t>10/29/2026</a:t>
             </a:fld>
             <a:endParaRPr lang="en-US"/>
           </a:p>
@@ -1646,7 +1652,7 @@
           <a:p>
             <a:fld id="{D4F53BF9-51A7-479A-9F82-F12307D0B401}" type="datetimeFigureOut">
               <a:rPr lang="en-US" smtClean="0"/>
-              <a:t>10/27/2026</a:t>
+              <a:t>10/29/2026</a:t>
             </a:fld>
             <a:endParaRPr lang="en-US"/>
           </a:p>
@@ -1923,7 +1929,7 @@
           <a:p>
             <a:fld id="{D4F53BF9-51A7-479A-9F82-F12307D0B401}" type="datetimeFigureOut">
               <a:rPr lang="en-US" smtClean="0"/>
-              <a:t>10/27/2026</a:t>
+              <a:t>10/29/2026</a:t>
             </a:fld>
             <a:endParaRPr lang="en-US"/>
           </a:p>
@@ -2287,7 +2293,7 @@
           <a:p>
             <a:fld id="{D4F53BF9-51A7-479A-9F82-F12307D0B401}" type="datetimeFigureOut">
               <a:rPr lang="en-US" smtClean="0"/>
-              <a:t>10/27/2026</a:t>
+              <a:t>10/29/2026</a:t>
             </a:fld>
             <a:endParaRPr lang="en-US"/>
           </a:p>
@@ -2582,7 +2588,7 @@
           <a:p>
             <a:fld id="{D4F53BF9-51A7-479A-9F82-F12307D0B401}" type="datetimeFigureOut">
               <a:rPr lang="en-US" smtClean="0"/>
-              <a:t>10/27/2026</a:t>
+              <a:t>10/29/2026</a:t>
             </a:fld>
             <a:endParaRPr lang="en-US"/>
           </a:p>
@@ -2857,7 +2863,7 @@
           <a:p>
             <a:fld id="{D4F53BF9-51A7-479A-9F82-F12307D0B401}" type="datetimeFigureOut">
               <a:rPr lang="en-US" smtClean="0"/>
-              <a:t>10/27/2026</a:t>
+              <a:t>10/29/2026</a:t>
             </a:fld>
             <a:endParaRPr lang="en-US"/>
           </a:p>
@@ -3184,7 +3190,7 @@
           <a:p>
             <a:fld id="{D4F53BF9-51A7-479A-9F82-F12307D0B401}" type="datetimeFigureOut">
               <a:rPr lang="en-US" smtClean="0"/>
-              <a:t>10/27/2026</a:t>
+              <a:t>10/29/2026</a:t>
             </a:fld>
             <a:endParaRPr lang="en-US"/>
           </a:p>
@@ -3486,7 +3492,7 @@
           <a:p>
             <a:fld id="{D4F53BF9-51A7-479A-9F82-F12307D0B401}" type="datetimeFigureOut">
               <a:rPr lang="en-US" smtClean="0"/>
-              <a:t>10/27/2026</a:t>
+              <a:t>10/29/2026</a:t>
             </a:fld>
             <a:endParaRPr lang="en-US"/>
           </a:p>
@@ -3758,7 +3764,7 @@
           <a:p>
             <a:fld id="{D4F53BF9-51A7-479A-9F82-F12307D0B401}" type="datetimeFigureOut">
               <a:rPr lang="en-US" smtClean="0"/>
-              <a:t>10/27/2026</a:t>
+              <a:t>10/29/2026</a:t>
             </a:fld>
             <a:endParaRPr lang="en-US"/>
           </a:p>
@@ -4157,7 +4163,7 @@
           <a:p>
             <a:fld id="{D4F53BF9-51A7-479A-9F82-F12307D0B401}" type="datetimeFigureOut">
               <a:rPr lang="en-US" smtClean="0"/>
-              <a:t>10/27/2026</a:t>
+              <a:t>10/29/2026</a:t>
             </a:fld>
             <a:endParaRPr lang="en-US"/>
           </a:p>
@@ -4599,7 +4605,7 @@
           <a:p>
             <a:fld id="{D4F53BF9-51A7-479A-9F82-F12307D0B401}" type="datetimeFigureOut">
               <a:rPr lang="en-US" smtClean="0"/>
-              <a:t>10/27/2026</a:t>
+              <a:t>10/29/2026</a:t>
             </a:fld>
             <a:endParaRPr lang="en-US"/>
           </a:p>
@@ -4889,7 +4895,7 @@
           <a:p>
             <a:fld id="{D4F53BF9-51A7-479A-9F82-F12307D0B401}" type="datetimeFigureOut">
               <a:rPr lang="en-US" smtClean="0"/>
-              <a:t>10/27/2026</a:t>
+              <a:t>10/29/2026</a:t>
             </a:fld>
             <a:endParaRPr lang="en-US"/>
           </a:p>
@@ -5309,7 +5315,7 @@
           <a:p>
             <a:fld id="{D4F53BF9-51A7-479A-9F82-F12307D0B401}" type="datetimeFigureOut">
               <a:rPr lang="en-US" smtClean="0"/>
-              <a:t>10/27/2026</a:t>
+              <a:t>10/29/2026</a:t>
             </a:fld>
             <a:endParaRPr lang="en-US"/>
           </a:p>
@@ -5457,7 +5463,7 @@
           <a:p>
             <a:fld id="{D4F53BF9-51A7-479A-9F82-F12307D0B401}" type="datetimeFigureOut">
               <a:rPr lang="en-US" smtClean="0"/>
-              <a:t>10/27/2026</a:t>
+              <a:t>10/29/2026</a:t>
             </a:fld>
             <a:endParaRPr lang="en-US"/>
           </a:p>
@@ -5570,7 +5576,7 @@
           <a:p>
             <a:fld id="{D4F53BF9-51A7-479A-9F82-F12307D0B401}" type="datetimeFigureOut">
               <a:rPr lang="en-US" smtClean="0"/>
-              <a:t>10/27/2026</a:t>
+              <a:t>10/29/2026</a:t>
             </a:fld>
             <a:endParaRPr lang="en-US"/>
           </a:p>
@@ -5978,7 +5984,7 @@
           <a:p>
             <a:fld id="{D4F53BF9-51A7-479A-9F82-F12307D0B401}" type="datetimeFigureOut">
               <a:rPr lang="en-US" smtClean="0"/>
-              <a:t>10/27/2026</a:t>
+              <a:t>10/29/2026</a:t>
             </a:fld>
             <a:endParaRPr lang="en-US"/>
           </a:p>
@@ -6427,7 +6433,7 @@
           <a:p>
             <a:fld id="{D4F53BF9-51A7-479A-9F82-F12307D0B401}" type="datetimeFigureOut">
               <a:rPr lang="en-US" smtClean="0"/>
-              <a:t>10/27/2026</a:t>
+              <a:t>10/29/2026</a:t>
             </a:fld>
             <a:endParaRPr lang="en-US"/>
           </a:p>
@@ -6845,7 +6851,7 @@
           <a:p>
             <a:fld id="{D4F53BF9-51A7-479A-9F82-F12307D0B401}" type="datetimeFigureOut">
               <a:rPr lang="en-US" smtClean="0"/>
-              <a:t>10/27/2026</a:t>
+              <a:t>10/29/2026</a:t>
             </a:fld>
             <a:endParaRPr lang="en-US"/>
           </a:p>
@@ -7209,7 +7215,7 @@
           <a:p>
             <a:fld id="{D4F53BF9-51A7-479A-9F82-F12307D0B401}" type="datetimeFigureOut">
               <a:rPr lang="en-US" smtClean="0"/>
-              <a:t>10/27/2026</a:t>
+              <a:t>10/29/2026</a:t>
             </a:fld>
             <a:endParaRPr lang="en-US"/>
           </a:p>
@@ -7507,7 +7513,7 @@
           <a:p>
             <a:fld id="{D4F53BF9-51A7-479A-9F82-F12307D0B401}" type="datetimeFigureOut">
               <a:rPr lang="en-US" smtClean="0"/>
-              <a:t>10/27/2026</a:t>
+              <a:t>10/29/2026</a:t>
             </a:fld>
             <a:endParaRPr lang="en-US"/>
           </a:p>
@@ -7978,7 +7984,7 @@
           <a:p>
             <a:fld id="{D4F53BF9-51A7-479A-9F82-F12307D0B401}" type="datetimeFigureOut">
               <a:rPr lang="en-US" smtClean="0"/>
-              <a:t>10/27/2026</a:t>
+              <a:t>10/29/2026</a:t>
             </a:fld>
             <a:endParaRPr lang="en-US"/>
           </a:p>
@@ -8442,7 +8448,7 @@
           <a:p>
             <a:fld id="{D4F53BF9-51A7-479A-9F82-F12307D0B401}" type="datetimeFigureOut">
               <a:rPr lang="en-US" smtClean="0"/>
-              <a:t>10/27/2026</a:t>
+              <a:t>10/29/2026</a:t>
             </a:fld>
             <a:endParaRPr lang="en-US"/>
           </a:p>
@@ -8712,7 +8718,7 @@
           <a:p>
             <a:fld id="{D4F53BF9-51A7-479A-9F82-F12307D0B401}" type="datetimeFigureOut">
               <a:rPr lang="en-US" smtClean="0"/>
-              <a:t>10/27/2026</a:t>
+              <a:t>10/29/2026</a:t>
             </a:fld>
             <a:endParaRPr lang="en-US"/>
           </a:p>
@@ -8931,7 +8937,7 @@
           <a:p>
             <a:fld id="{D4F53BF9-51A7-479A-9F82-F12307D0B401}" type="datetimeFigureOut">
               <a:rPr lang="en-US" smtClean="0"/>
-              <a:t>10/27/2026</a:t>
+              <a:t>10/29/2026</a:t>
             </a:fld>
             <a:endParaRPr lang="en-US"/>
           </a:p>
@@ -9245,7 +9251,7 @@
           <a:p>
             <a:fld id="{D4F53BF9-51A7-479A-9F82-F12307D0B401}" type="datetimeFigureOut">
               <a:rPr lang="en-US" smtClean="0"/>
-              <a:t>10/27/2026</a:t>
+              <a:t>10/29/2026</a:t>
             </a:fld>
             <a:endParaRPr lang="en-US"/>
           </a:p>
@@ -10032,6 +10038,251 @@
           <p:cNvPr id="2" name="Title 1">
             <a:extLst>
               <a:ext uri="{FF2B5EF4-FFF2-40B4-BE49-F238E27FC236}">
+                <a16:creationId xmlns:a16="http://schemas.microsoft.com/office/drawing/2014/main" id="{8C7C6F8D-F38C-9801-5ADC-D11444ACB582}"/>
+              </a:ext>
+            </a:extLst>
+          </p:cNvPr>
+          <p:cNvSpPr>
+            <a:spLocks noGrp="1"/>
+          </p:cNvSpPr>
+          <p:nvPr>
+            <p:ph type="title"/>
+          </p:nvPr>
+        </p:nvSpPr>
+        <p:spPr>
+          <a:xfrm>
+            <a:off x="445477" y="282317"/>
+            <a:ext cx="6066927" cy="859491"/>
+          </a:xfrm>
+        </p:spPr>
+        <p:txBody>
+          <a:bodyPr>
+            <a:normAutofit/>
+          </a:bodyPr>
+          <a:lstStyle/>
+          <a:p>
+            <a:r>
+              <a:rPr lang="en-US" sz="4000">
+                <a:solidFill>
+                  <a:schemeClr val="tx1"/>
+                </a:solidFill>
+              </a:rPr>
+              <a:t>2d Intersection Builder</a:t>
+            </a:r>
+            <a:endParaRPr lang="en-US" sz="4000" dirty="0">
+              <a:solidFill>
+                <a:schemeClr val="tx1"/>
+              </a:solidFill>
+            </a:endParaRPr>
+          </a:p>
+        </p:txBody>
+      </p:sp>
+      <p:sp>
+        <p:nvSpPr>
+          <p:cNvPr id="3" name="Content Placeholder 2">
+            <a:extLst>
+              <a:ext uri="{FF2B5EF4-FFF2-40B4-BE49-F238E27FC236}">
+                <a16:creationId xmlns:a16="http://schemas.microsoft.com/office/drawing/2014/main" id="{82F72F78-AB0B-5033-5262-0A04BEC8EC30}"/>
+              </a:ext>
+            </a:extLst>
+          </p:cNvPr>
+          <p:cNvSpPr>
+            <a:spLocks noGrp="1"/>
+          </p:cNvSpPr>
+          <p:nvPr>
+            <p:ph idx="1"/>
+          </p:nvPr>
+        </p:nvSpPr>
+        <p:spPr>
+          <a:xfrm>
+            <a:off x="445478" y="1256704"/>
+            <a:ext cx="4314092" cy="4344592"/>
+          </a:xfrm>
+        </p:spPr>
+        <p:txBody>
+          <a:bodyPr>
+            <a:noAutofit/>
+          </a:bodyPr>
+          <a:lstStyle/>
+          <a:p>
+            <a:pPr marL="0" indent="0">
+              <a:buNone/>
+            </a:pPr>
+            <a:r>
+              <a:rPr lang="en-US" sz="2400" dirty="0">
+                <a:solidFill>
+                  <a:schemeClr val="tx1"/>
+                </a:solidFill>
+              </a:rPr>
+              <a:t>Users will be able to build an intersection by dragging and dropping components in the sandbox</a:t>
+            </a:r>
+          </a:p>
+          <a:p>
+            <a:pPr>
+              <a:lnSpc>
+                <a:spcPct val="200000"/>
+              </a:lnSpc>
+            </a:pPr>
+            <a:r>
+              <a:rPr lang="en-US" sz="2400" dirty="0">
+                <a:solidFill>
+                  <a:schemeClr val="tx1"/>
+                </a:solidFill>
+              </a:rPr>
+              <a:t>4-way, Roundabouts, T-intersection, etc.</a:t>
+            </a:r>
+          </a:p>
+          <a:p>
+            <a:pPr>
+              <a:lnSpc>
+                <a:spcPct val="200000"/>
+              </a:lnSpc>
+            </a:pPr>
+            <a:r>
+              <a:rPr lang="en-US" sz="2400" dirty="0">
+                <a:solidFill>
+                  <a:schemeClr val="tx1"/>
+                </a:solidFill>
+              </a:rPr>
+              <a:t>Signals, stop/yield signs</a:t>
+            </a:r>
+          </a:p>
+          <a:p>
+            <a:pPr>
+              <a:lnSpc>
+                <a:spcPct val="200000"/>
+              </a:lnSpc>
+            </a:pPr>
+            <a:r>
+              <a:rPr lang="en-US" sz="2400" dirty="0">
+                <a:solidFill>
+                  <a:schemeClr val="tx1"/>
+                </a:solidFill>
+              </a:rPr>
+              <a:t>Configure lanes and speed limits</a:t>
+            </a:r>
+          </a:p>
+        </p:txBody>
+      </p:sp>
+      <p:sp>
+        <p:nvSpPr>
+          <p:cNvPr id="9" name="Rectangle 8">
+            <a:extLst>
+              <a:ext uri="{FF2B5EF4-FFF2-40B4-BE49-F238E27FC236}">
+                <a16:creationId xmlns:a16="http://schemas.microsoft.com/office/drawing/2014/main" id="{7B76EB77-87C3-A564-4731-09D1E360D9BF}"/>
+              </a:ext>
+            </a:extLst>
+          </p:cNvPr>
+          <p:cNvSpPr/>
+          <p:nvPr/>
+        </p:nvSpPr>
+        <p:spPr>
+          <a:xfrm>
+            <a:off x="4759570" y="1540906"/>
+            <a:ext cx="6780198" cy="3776187"/>
+          </a:xfrm>
+          <a:prstGeom prst="rect">
+            <a:avLst/>
+          </a:prstGeom>
+          <a:solidFill>
+            <a:schemeClr val="tx1"/>
+          </a:solidFill>
+          <a:ln>
+            <a:solidFill>
+              <a:schemeClr val="tx1"/>
+            </a:solidFill>
+          </a:ln>
+        </p:spPr>
+        <p:style>
+          <a:lnRef idx="2">
+            <a:schemeClr val="accent1">
+              <a:shade val="15000"/>
+            </a:schemeClr>
+          </a:lnRef>
+          <a:fillRef idx="1">
+            <a:schemeClr val="accent1"/>
+          </a:fillRef>
+          <a:effectRef idx="0">
+            <a:schemeClr val="accent1"/>
+          </a:effectRef>
+          <a:fontRef idx="minor">
+            <a:schemeClr val="lt1"/>
+          </a:fontRef>
+        </p:style>
+        <p:txBody>
+          <a:bodyPr rtlCol="0" anchor="ctr"/>
+          <a:lstStyle/>
+          <a:p>
+            <a:pPr algn="ctr"/>
+            <a:endParaRPr lang="en-US" dirty="0"/>
+          </a:p>
+        </p:txBody>
+      </p:sp>
+      <p:pic>
+        <p:nvPicPr>
+          <p:cNvPr id="11" name="Picture 10">
+            <a:extLst>
+              <a:ext uri="{FF2B5EF4-FFF2-40B4-BE49-F238E27FC236}">
+                <a16:creationId xmlns:a16="http://schemas.microsoft.com/office/drawing/2014/main" id="{BF845DC4-61B5-2752-CA13-2A713088B8DE}"/>
+              </a:ext>
+            </a:extLst>
+          </p:cNvPr>
+          <p:cNvPicPr>
+            <a:picLocks noChangeAspect="1"/>
+          </p:cNvPicPr>
+          <p:nvPr/>
+        </p:nvPicPr>
+        <p:blipFill>
+          <a:blip r:embed="rId2"/>
+          <a:stretch>
+            <a:fillRect/>
+          </a:stretch>
+        </p:blipFill>
+        <p:spPr>
+          <a:xfrm>
+            <a:off x="4759570" y="1540905"/>
+            <a:ext cx="6780198" cy="3776187"/>
+          </a:xfrm>
+          <a:prstGeom prst="rect">
+            <a:avLst/>
+          </a:prstGeom>
+        </p:spPr>
+      </p:pic>
+    </p:spTree>
+    <p:extLst>
+      <p:ext uri="{BB962C8B-B14F-4D97-AF65-F5344CB8AC3E}">
+        <p14:creationId xmlns:p14="http://schemas.microsoft.com/office/powerpoint/2010/main" val="2256725576"/>
+      </p:ext>
+    </p:extLst>
+  </p:cSld>
+  <p:clrMapOvr>
+    <a:masterClrMapping/>
+  </p:clrMapOvr>
+</p:sld>
+</file>
+
+<file path=ppt/slides/slide3.xml><?xml version="1.0" encoding="utf-8"?>
+<p:sld xmlns:a="http://schemas.openxmlformats.org/drawingml/2006/main" xmlns:r="http://schemas.openxmlformats.org/officeDocument/2006/relationships" xmlns:p="http://schemas.openxmlformats.org/presentationml/2006/main">
+  <p:cSld>
+    <p:spTree>
+      <p:nvGrpSpPr>
+        <p:cNvPr id="1" name=""/>
+        <p:cNvGrpSpPr/>
+        <p:nvPr/>
+      </p:nvGrpSpPr>
+      <p:grpSpPr>
+        <a:xfrm>
+          <a:off x="0" y="0"/>
+          <a:ext cx="0" cy="0"/>
+          <a:chOff x="0" y="0"/>
+          <a:chExt cx="0" cy="0"/>
+        </a:xfrm>
+      </p:grpSpPr>
+      <p:sp>
+        <p:nvSpPr>
+          <p:cNvPr id="2" name="Title 1">
+            <a:extLst>
+              <a:ext uri="{FF2B5EF4-FFF2-40B4-BE49-F238E27FC236}">
                 <a16:creationId xmlns:a16="http://schemas.microsoft.com/office/drawing/2014/main" id="{017A6928-A1FD-AFE4-7BFB-C26DA00157E2}"/>
               </a:ext>
             </a:extLst>

--- a/Traffic-Simulator.pptx
+++ b/Traffic-Simulator.pptx
@@ -7,7 +7,8 @@
   <p:sldIdLst>
     <p:sldId id="256" r:id="rId2"/>
     <p:sldId id="258" r:id="rId3"/>
-    <p:sldId id="257" r:id="rId4"/>
+    <p:sldId id="259" r:id="rId4"/>
+    <p:sldId id="260" r:id="rId5"/>
   </p:sldIdLst>
   <p:sldSz cx="12192000" cy="6858000"/>
   <p:notesSz cx="6858000" cy="9144000"/>
@@ -10062,18 +10063,13 @@
           <a:lstStyle/>
           <a:p>
             <a:r>
-              <a:rPr lang="en-US" sz="4000">
+              <a:rPr lang="en-US" sz="4000" dirty="0">
                 <a:solidFill>
                   <a:schemeClr val="tx1"/>
                 </a:solidFill>
               </a:rPr>
               <a:t>2d Intersection Builder</a:t>
             </a:r>
-            <a:endParaRPr lang="en-US" sz="4000" dirty="0">
-              <a:solidFill>
-                <a:schemeClr val="tx1"/>
-              </a:solidFill>
-            </a:endParaRPr>
           </a:p>
         </p:txBody>
       </p:sp>
@@ -10178,8 +10174,8 @@
         </p:nvSpPr>
         <p:spPr>
           <a:xfrm>
-            <a:off x="4759570" y="1540906"/>
-            <a:ext cx="6780198" cy="3776187"/>
+            <a:off x="4759569" y="1710212"/>
+            <a:ext cx="6830097" cy="3891084"/>
           </a:xfrm>
           <a:prstGeom prst="rect">
             <a:avLst/>
@@ -10220,10 +10216,10 @@
       </p:sp>
       <p:pic>
         <p:nvPicPr>
-          <p:cNvPr id="11" name="Picture 10">
-            <a:extLst>
-              <a:ext uri="{FF2B5EF4-FFF2-40B4-BE49-F238E27FC236}">
-                <a16:creationId xmlns:a16="http://schemas.microsoft.com/office/drawing/2014/main" id="{BF845DC4-61B5-2752-CA13-2A713088B8DE}"/>
+          <p:cNvPr id="13" name="Picture 12">
+            <a:extLst>
+              <a:ext uri="{FF2B5EF4-FFF2-40B4-BE49-F238E27FC236}">
+                <a16:creationId xmlns:a16="http://schemas.microsoft.com/office/drawing/2014/main" id="{2C7ECBA5-50F0-90BB-67CE-F76B8C842B8E}"/>
               </a:ext>
             </a:extLst>
           </p:cNvPr>
@@ -10240,8 +10236,8 @@
         </p:blipFill>
         <p:spPr>
           <a:xfrm>
-            <a:off x="4759570" y="1540905"/>
-            <a:ext cx="6780198" cy="3776187"/>
+            <a:off x="4759568" y="1710212"/>
+            <a:ext cx="6830097" cy="3891085"/>
           </a:xfrm>
           <a:prstGeom prst="rect">
             <a:avLst/>
@@ -10283,7 +10279,7 @@
           <p:cNvPr id="2" name="Title 1">
             <a:extLst>
               <a:ext uri="{FF2B5EF4-FFF2-40B4-BE49-F238E27FC236}">
-                <a16:creationId xmlns:a16="http://schemas.microsoft.com/office/drawing/2014/main" id="{017A6928-A1FD-AFE4-7BFB-C26DA00157E2}"/>
+                <a16:creationId xmlns:a16="http://schemas.microsoft.com/office/drawing/2014/main" id="{36F5FCF2-3F5B-9C69-21C6-5A8B4345647C}"/>
               </a:ext>
             </a:extLst>
           </p:cNvPr>
@@ -10296,8 +10292,47 @@
         </p:nvSpPr>
         <p:spPr>
           <a:xfrm>
-            <a:off x="393192" y="346115"/>
-            <a:ext cx="11393424" cy="1494845"/>
+            <a:off x="603504" y="430047"/>
+            <a:ext cx="4939005" cy="711761"/>
+          </a:xfrm>
+        </p:spPr>
+        <p:txBody>
+          <a:bodyPr>
+            <a:normAutofit fontScale="90000"/>
+          </a:bodyPr>
+          <a:lstStyle/>
+          <a:p>
+            <a:r>
+              <a:rPr lang="en-US" sz="4000" dirty="0">
+                <a:solidFill>
+                  <a:schemeClr val="tx1"/>
+                </a:solidFill>
+              </a:rPr>
+              <a:t>Vehicle simulation</a:t>
+            </a:r>
+          </a:p>
+        </p:txBody>
+      </p:sp>
+      <p:sp>
+        <p:nvSpPr>
+          <p:cNvPr id="3" name="Content Placeholder 2">
+            <a:extLst>
+              <a:ext uri="{FF2B5EF4-FFF2-40B4-BE49-F238E27FC236}">
+                <a16:creationId xmlns:a16="http://schemas.microsoft.com/office/drawing/2014/main" id="{B0D3B147-8CDA-FF53-1E9D-8D0C6AB90382}"/>
+              </a:ext>
+            </a:extLst>
+          </p:cNvPr>
+          <p:cNvSpPr>
+            <a:spLocks noGrp="1"/>
+          </p:cNvSpPr>
+          <p:nvPr>
+            <p:ph idx="1"/>
+          </p:nvPr>
+        </p:nvSpPr>
+        <p:spPr>
+          <a:xfrm>
+            <a:off x="497997" y="1277814"/>
+            <a:ext cx="6698045" cy="5486401"/>
           </a:xfrm>
         </p:spPr>
         <p:txBody>
@@ -10306,9 +10341,193 @@
           </a:bodyPr>
           <a:lstStyle/>
           <a:p>
-            <a:r>
-              <a:rPr lang="en-US" sz="4000" dirty="0"/>
-              <a:t>Example Slide Title</a:t>
+            <a:pPr marL="0" indent="0">
+              <a:lnSpc>
+                <a:spcPct val="110000"/>
+              </a:lnSpc>
+              <a:buNone/>
+            </a:pPr>
+            <a:r>
+              <a:rPr lang="en-US" sz="2400" dirty="0">
+                <a:solidFill>
+                  <a:schemeClr val="tx1"/>
+                </a:solidFill>
+              </a:rPr>
+              <a:t>Simulation shows individual cars moving through an intersection, allowing users to view how a design will handle traffic</a:t>
+            </a:r>
+          </a:p>
+          <a:p>
+            <a:pPr>
+              <a:lnSpc>
+                <a:spcPct val="200000"/>
+              </a:lnSpc>
+            </a:pPr>
+            <a:r>
+              <a:rPr lang="en-US" sz="2400" dirty="0">
+                <a:solidFill>
+                  <a:schemeClr val="tx1"/>
+                </a:solidFill>
+              </a:rPr>
+              <a:t>Basic Driver Behavior Model</a:t>
+            </a:r>
+          </a:p>
+          <a:p>
+            <a:pPr>
+              <a:lnSpc>
+                <a:spcPct val="200000"/>
+              </a:lnSpc>
+            </a:pPr>
+            <a:r>
+              <a:rPr lang="en-US" sz="2400" dirty="0">
+                <a:solidFill>
+                  <a:schemeClr val="tx1"/>
+                </a:solidFill>
+              </a:rPr>
+              <a:t>Variation between drivers</a:t>
+            </a:r>
+          </a:p>
+          <a:p>
+            <a:pPr>
+              <a:lnSpc>
+                <a:spcPct val="200000"/>
+              </a:lnSpc>
+            </a:pPr>
+            <a:r>
+              <a:rPr lang="en-US" sz="2400" dirty="0">
+                <a:solidFill>
+                  <a:schemeClr val="tx1"/>
+                </a:solidFill>
+              </a:rPr>
+              <a:t>Cars abide by traffic rules</a:t>
+            </a:r>
+          </a:p>
+          <a:p>
+            <a:pPr>
+              <a:lnSpc>
+                <a:spcPct val="200000"/>
+              </a:lnSpc>
+            </a:pPr>
+            <a:r>
+              <a:rPr lang="en-US" sz="2400" dirty="0">
+                <a:solidFill>
+                  <a:schemeClr val="tx1"/>
+                </a:solidFill>
+              </a:rPr>
+              <a:t>Adjustable simulation speed (1.0x, 2.0x)</a:t>
+            </a:r>
+          </a:p>
+          <a:p>
+            <a:pPr marL="0" indent="0">
+              <a:lnSpc>
+                <a:spcPct val="110000"/>
+              </a:lnSpc>
+              <a:buNone/>
+            </a:pPr>
+            <a:endParaRPr lang="en-US" sz="2400" dirty="0"/>
+          </a:p>
+        </p:txBody>
+      </p:sp>
+      <p:pic>
+        <p:nvPicPr>
+          <p:cNvPr id="6" name="Picture 5">
+            <a:extLst>
+              <a:ext uri="{FF2B5EF4-FFF2-40B4-BE49-F238E27FC236}">
+                <a16:creationId xmlns:a16="http://schemas.microsoft.com/office/drawing/2014/main" id="{4420634E-CD22-082D-26B6-1ADAF1C00F1D}"/>
+              </a:ext>
+            </a:extLst>
+          </p:cNvPr>
+          <p:cNvPicPr>
+            <a:picLocks noChangeAspect="1"/>
+          </p:cNvPicPr>
+          <p:nvPr/>
+        </p:nvPicPr>
+        <p:blipFill>
+          <a:blip r:embed="rId2"/>
+          <a:stretch>
+            <a:fillRect/>
+          </a:stretch>
+        </p:blipFill>
+        <p:spPr>
+          <a:xfrm>
+            <a:off x="5416061" y="2151090"/>
+            <a:ext cx="5908431" cy="4049700"/>
+          </a:xfrm>
+          <a:prstGeom prst="rect">
+            <a:avLst/>
+          </a:prstGeom>
+        </p:spPr>
+      </p:pic>
+    </p:spTree>
+    <p:extLst>
+      <p:ext uri="{BB962C8B-B14F-4D97-AF65-F5344CB8AC3E}">
+        <p14:creationId xmlns:p14="http://schemas.microsoft.com/office/powerpoint/2010/main" val="2797149679"/>
+      </p:ext>
+    </p:extLst>
+  </p:cSld>
+  <p:clrMapOvr>
+    <a:masterClrMapping/>
+  </p:clrMapOvr>
+</p:sld>
+</file>
+
+<file path=ppt/slides/slide4.xml><?xml version="1.0" encoding="utf-8"?>
+<p:sld xmlns:a="http://schemas.openxmlformats.org/drawingml/2006/main" xmlns:r="http://schemas.openxmlformats.org/officeDocument/2006/relationships" xmlns:p="http://schemas.openxmlformats.org/presentationml/2006/main">
+  <p:cSld>
+    <p:spTree>
+      <p:nvGrpSpPr>
+        <p:cNvPr id="1" name="">
+          <a:extLst>
+            <a:ext uri="{FF2B5EF4-FFF2-40B4-BE49-F238E27FC236}">
+              <a16:creationId xmlns:a16="http://schemas.microsoft.com/office/drawing/2014/main" id="{64AE47CC-32B9-E0D1-F54F-0E22AFC00D2C}"/>
+            </a:ext>
+          </a:extLst>
+        </p:cNvPr>
+        <p:cNvGrpSpPr/>
+        <p:nvPr/>
+      </p:nvGrpSpPr>
+      <p:grpSpPr>
+        <a:xfrm>
+          <a:off x="0" y="0"/>
+          <a:ext cx="0" cy="0"/>
+          <a:chOff x="0" y="0"/>
+          <a:chExt cx="0" cy="0"/>
+        </a:xfrm>
+      </p:grpSpPr>
+      <p:sp>
+        <p:nvSpPr>
+          <p:cNvPr id="2" name="Title 1">
+            <a:extLst>
+              <a:ext uri="{FF2B5EF4-FFF2-40B4-BE49-F238E27FC236}">
+                <a16:creationId xmlns:a16="http://schemas.microsoft.com/office/drawing/2014/main" id="{471030CE-DF29-D24E-4FC5-85CF61BAE326}"/>
+              </a:ext>
+            </a:extLst>
+          </p:cNvPr>
+          <p:cNvSpPr>
+            <a:spLocks noGrp="1"/>
+          </p:cNvSpPr>
+          <p:nvPr>
+            <p:ph type="title"/>
+          </p:nvPr>
+        </p:nvSpPr>
+        <p:spPr>
+          <a:xfrm>
+            <a:off x="603504" y="430047"/>
+            <a:ext cx="5961419" cy="711761"/>
+          </a:xfrm>
+        </p:spPr>
+        <p:txBody>
+          <a:bodyPr>
+            <a:normAutofit fontScale="90000"/>
+          </a:bodyPr>
+          <a:lstStyle/>
+          <a:p>
+            <a:r>
+              <a:rPr lang="en-US" sz="4000" dirty="0">
+                <a:solidFill>
+                  <a:schemeClr val="tx1"/>
+                </a:solidFill>
+              </a:rPr>
+              <a:t>Basic pedestrian support</a:t>
             </a:r>
           </a:p>
         </p:txBody>
@@ -10318,7 +10537,7 @@
           <p:cNvPr id="3" name="Content Placeholder 2">
             <a:extLst>
               <a:ext uri="{FF2B5EF4-FFF2-40B4-BE49-F238E27FC236}">
-                <a16:creationId xmlns:a16="http://schemas.microsoft.com/office/drawing/2014/main" id="{9B599297-9B04-6E34-D42D-263741081DD7}"/>
+                <a16:creationId xmlns:a16="http://schemas.microsoft.com/office/drawing/2014/main" id="{5289754C-7375-1EF6-8EB1-47E363F15610}"/>
               </a:ext>
             </a:extLst>
           </p:cNvPr>
@@ -10331,8 +10550,8 @@
         </p:nvSpPr>
         <p:spPr>
           <a:xfrm>
-            <a:off x="722376" y="1331049"/>
-            <a:ext cx="10799064" cy="4683318"/>
+            <a:off x="689722" y="1300153"/>
+            <a:ext cx="5961420" cy="1266094"/>
           </a:xfrm>
         </p:spPr>
         <p:txBody>
@@ -10342,11 +10561,319 @@
           <a:lstStyle/>
           <a:p>
             <a:pPr marL="0" indent="0">
+              <a:lnSpc>
+                <a:spcPct val="110000"/>
+              </a:lnSpc>
               <a:buNone/>
             </a:pPr>
             <a:r>
+              <a:rPr lang="en-US" sz="2400" dirty="0">
+                <a:solidFill>
+                  <a:schemeClr val="tx1"/>
+                </a:solidFill>
+              </a:rPr>
+              <a:t>Pedestrians cross at marked crosswalks, allowing for designs to account for people walking as well</a:t>
+            </a:r>
+          </a:p>
+        </p:txBody>
+      </p:sp>
+      <p:pic>
+        <p:nvPicPr>
+          <p:cNvPr id="5" name="Picture 4">
+            <a:extLst>
+              <a:ext uri="{FF2B5EF4-FFF2-40B4-BE49-F238E27FC236}">
+                <a16:creationId xmlns:a16="http://schemas.microsoft.com/office/drawing/2014/main" id="{D570D93D-31A1-D503-EE12-3328B06FA7C2}"/>
+              </a:ext>
+            </a:extLst>
+          </p:cNvPr>
+          <p:cNvPicPr>
+            <a:picLocks noChangeAspect="1"/>
+          </p:cNvPicPr>
+          <p:nvPr/>
+        </p:nvPicPr>
+        <p:blipFill>
+          <a:blip r:embed="rId2"/>
+          <a:stretch>
+            <a:fillRect/>
+          </a:stretch>
+        </p:blipFill>
+        <p:spPr>
+          <a:xfrm>
+            <a:off x="689721" y="2283066"/>
+            <a:ext cx="4578096" cy="3845601"/>
+          </a:xfrm>
+          <a:prstGeom prst="rect">
+            <a:avLst/>
+          </a:prstGeom>
+        </p:spPr>
+      </p:pic>
+      <p:sp>
+        <p:nvSpPr>
+          <p:cNvPr id="7" name="Content Placeholder 2">
+            <a:extLst>
+              <a:ext uri="{FF2B5EF4-FFF2-40B4-BE49-F238E27FC236}">
+                <a16:creationId xmlns:a16="http://schemas.microsoft.com/office/drawing/2014/main" id="{FC7FE8F6-E067-9E73-40B8-1B51BDD046A5}"/>
+              </a:ext>
+            </a:extLst>
+          </p:cNvPr>
+          <p:cNvSpPr txBox="1">
+            <a:spLocks/>
+          </p:cNvSpPr>
+          <p:nvPr/>
+        </p:nvSpPr>
+        <p:spPr>
+          <a:xfrm>
+            <a:off x="5911845" y="2162906"/>
+            <a:ext cx="4278036" cy="1266094"/>
+          </a:xfrm>
+          <a:prstGeom prst="rect">
+            <a:avLst/>
+          </a:prstGeom>
+        </p:spPr>
+        <p:txBody>
+          <a:bodyPr vert="horz" lIns="91440" tIns="45720" rIns="91440" bIns="45720" rtlCol="0">
+            <a:normAutofit/>
+          </a:bodyPr>
+          <a:lstStyle>
+            <a:lvl1pPr marL="228600" indent="-228600" algn="l" defTabSz="914400" rtl="0" eaLnBrk="1" latinLnBrk="0" hangingPunct="1">
+              <a:lnSpc>
+                <a:spcPct val="120000"/>
+              </a:lnSpc>
+              <a:spcBef>
+                <a:spcPts val="1000"/>
+              </a:spcBef>
+              <a:buFont typeface="Arial" panose="020B0604020202020204" pitchFamily="34" charset="0"/>
+              <a:buChar char="•"/>
+              <a:defRPr sz="1400" kern="1200">
+                <a:solidFill>
+                  <a:schemeClr val="tx2"/>
+                </a:solidFill>
+                <a:latin typeface="+mn-lt"/>
+                <a:ea typeface="+mn-ea"/>
+                <a:cs typeface="+mn-cs"/>
+              </a:defRPr>
+            </a:lvl1pPr>
+            <a:lvl2pPr marL="685800" indent="-228600" algn="l" defTabSz="914400" rtl="0" eaLnBrk="1" latinLnBrk="0" hangingPunct="1">
+              <a:lnSpc>
+                <a:spcPct val="120000"/>
+              </a:lnSpc>
+              <a:spcBef>
+                <a:spcPts val="500"/>
+              </a:spcBef>
+              <a:buFont typeface="Arial" panose="020B0604020202020204" pitchFamily="34" charset="0"/>
+              <a:buChar char="•"/>
+              <a:defRPr sz="1400" kern="1200">
+                <a:solidFill>
+                  <a:schemeClr val="tx2"/>
+                </a:solidFill>
+                <a:latin typeface="+mn-lt"/>
+                <a:ea typeface="+mn-ea"/>
+                <a:cs typeface="+mn-cs"/>
+              </a:defRPr>
+            </a:lvl2pPr>
+            <a:lvl3pPr marL="1143000" indent="-228600" algn="l" defTabSz="914400" rtl="0" eaLnBrk="1" latinLnBrk="0" hangingPunct="1">
+              <a:lnSpc>
+                <a:spcPct val="120000"/>
+              </a:lnSpc>
+              <a:spcBef>
+                <a:spcPts val="500"/>
+              </a:spcBef>
+              <a:buFont typeface="Arial" panose="020B0604020202020204" pitchFamily="34" charset="0"/>
+              <a:buChar char="•"/>
+              <a:defRPr sz="1400" kern="1200">
+                <a:solidFill>
+                  <a:schemeClr val="tx2"/>
+                </a:solidFill>
+                <a:latin typeface="+mn-lt"/>
+                <a:ea typeface="+mn-ea"/>
+                <a:cs typeface="+mn-cs"/>
+              </a:defRPr>
+            </a:lvl3pPr>
+            <a:lvl4pPr marL="1600200" indent="-228600" algn="l" defTabSz="914400" rtl="0" eaLnBrk="1" latinLnBrk="0" hangingPunct="1">
+              <a:lnSpc>
+                <a:spcPct val="120000"/>
+              </a:lnSpc>
+              <a:spcBef>
+                <a:spcPts val="500"/>
+              </a:spcBef>
+              <a:buFont typeface="Arial" panose="020B0604020202020204" pitchFamily="34" charset="0"/>
+              <a:buChar char="•"/>
+              <a:defRPr sz="1200" kern="1200">
+                <a:solidFill>
+                  <a:schemeClr val="tx2"/>
+                </a:solidFill>
+                <a:latin typeface="+mn-lt"/>
+                <a:ea typeface="+mn-ea"/>
+                <a:cs typeface="+mn-cs"/>
+              </a:defRPr>
+            </a:lvl4pPr>
+            <a:lvl5pPr marL="2057400" indent="-228600" algn="l" defTabSz="914400" rtl="0" eaLnBrk="1" latinLnBrk="0" hangingPunct="1">
+              <a:lnSpc>
+                <a:spcPct val="120000"/>
+              </a:lnSpc>
+              <a:spcBef>
+                <a:spcPts val="500"/>
+              </a:spcBef>
+              <a:buFont typeface="Arial" panose="020B0604020202020204" pitchFamily="34" charset="0"/>
+              <a:buChar char="•"/>
+              <a:defRPr sz="1200" kern="1200">
+                <a:solidFill>
+                  <a:schemeClr val="tx2"/>
+                </a:solidFill>
+                <a:latin typeface="+mn-lt"/>
+                <a:ea typeface="+mn-ea"/>
+                <a:cs typeface="+mn-cs"/>
+              </a:defRPr>
+            </a:lvl5pPr>
+            <a:lvl6pPr marL="2514600" indent="-228600" algn="l" defTabSz="914400" rtl="0" eaLnBrk="1" latinLnBrk="0" hangingPunct="1">
+              <a:lnSpc>
+                <a:spcPct val="90000"/>
+              </a:lnSpc>
+              <a:spcBef>
+                <a:spcPts val="500"/>
+              </a:spcBef>
+              <a:buFont typeface="Arial" panose="020B0604020202020204" pitchFamily="34" charset="0"/>
+              <a:buChar char="•"/>
+              <a:defRPr sz="1800" kern="1200">
+                <a:solidFill>
+                  <a:schemeClr val="tx1"/>
+                </a:solidFill>
+                <a:latin typeface="+mn-lt"/>
+                <a:ea typeface="+mn-ea"/>
+                <a:cs typeface="+mn-cs"/>
+              </a:defRPr>
+            </a:lvl6pPr>
+            <a:lvl7pPr marL="2971800" indent="-228600" algn="l" defTabSz="914400" rtl="0" eaLnBrk="1" latinLnBrk="0" hangingPunct="1">
+              <a:lnSpc>
+                <a:spcPct val="90000"/>
+              </a:lnSpc>
+              <a:spcBef>
+                <a:spcPts val="500"/>
+              </a:spcBef>
+              <a:buFont typeface="Arial" panose="020B0604020202020204" pitchFamily="34" charset="0"/>
+              <a:buChar char="•"/>
+              <a:defRPr sz="1800" kern="1200">
+                <a:solidFill>
+                  <a:schemeClr val="tx1"/>
+                </a:solidFill>
+                <a:latin typeface="+mn-lt"/>
+                <a:ea typeface="+mn-ea"/>
+                <a:cs typeface="+mn-cs"/>
+              </a:defRPr>
+            </a:lvl7pPr>
+            <a:lvl8pPr marL="3429000" indent="-228600" algn="l" defTabSz="914400" rtl="0" eaLnBrk="1" latinLnBrk="0" hangingPunct="1">
+              <a:lnSpc>
+                <a:spcPct val="90000"/>
+              </a:lnSpc>
+              <a:spcBef>
+                <a:spcPts val="500"/>
+              </a:spcBef>
+              <a:buFont typeface="Arial" panose="020B0604020202020204" pitchFamily="34" charset="0"/>
+              <a:buChar char="•"/>
+              <a:defRPr sz="1800" kern="1200">
+                <a:solidFill>
+                  <a:schemeClr val="tx1"/>
+                </a:solidFill>
+                <a:latin typeface="+mn-lt"/>
+                <a:ea typeface="+mn-ea"/>
+                <a:cs typeface="+mn-cs"/>
+              </a:defRPr>
+            </a:lvl8pPr>
+            <a:lvl9pPr marL="3886200" indent="-228600" algn="l" defTabSz="914400" rtl="0" eaLnBrk="1" latinLnBrk="0" hangingPunct="1">
+              <a:lnSpc>
+                <a:spcPct val="90000"/>
+              </a:lnSpc>
+              <a:spcBef>
+                <a:spcPts val="500"/>
+              </a:spcBef>
+              <a:buFont typeface="Arial" panose="020B0604020202020204" pitchFamily="34" charset="0"/>
+              <a:buChar char="•"/>
+              <a:defRPr sz="1800" kern="1200">
+                <a:solidFill>
+                  <a:schemeClr val="tx1"/>
+                </a:solidFill>
+                <a:latin typeface="+mn-lt"/>
+                <a:ea typeface="+mn-ea"/>
+                <a:cs typeface="+mn-cs"/>
+              </a:defRPr>
+            </a:lvl9pPr>
+          </a:lstStyle>
+          <a:p>
+            <a:pPr marL="0" indent="0">
+              <a:lnSpc>
+                <a:spcPct val="110000"/>
+              </a:lnSpc>
+              <a:buFont typeface="Arial" panose="020B0604020202020204" pitchFamily="34" charset="0"/>
+              <a:buNone/>
+            </a:pPr>
+            <a:endParaRPr lang="en-US" sz="2400" dirty="0"/>
+          </a:p>
+        </p:txBody>
+      </p:sp>
+      <p:sp>
+        <p:nvSpPr>
+          <p:cNvPr id="8" name="TextBox 7">
+            <a:extLst>
+              <a:ext uri="{FF2B5EF4-FFF2-40B4-BE49-F238E27FC236}">
+                <a16:creationId xmlns:a16="http://schemas.microsoft.com/office/drawing/2014/main" id="{D11D455F-97CC-6A05-6BED-2DDE520438CB}"/>
+              </a:ext>
+            </a:extLst>
+          </p:cNvPr>
+          <p:cNvSpPr txBox="1"/>
+          <p:nvPr/>
+        </p:nvSpPr>
+        <p:spPr>
+          <a:xfrm>
+            <a:off x="5873556" y="2162906"/>
+            <a:ext cx="5093911" cy="2936830"/>
+          </a:xfrm>
+          <a:prstGeom prst="rect">
+            <a:avLst/>
+          </a:prstGeom>
+          <a:noFill/>
+        </p:spPr>
+        <p:txBody>
+          <a:bodyPr wrap="square" rtlCol="0">
+            <a:spAutoFit/>
+          </a:bodyPr>
+          <a:lstStyle/>
+          <a:p>
+            <a:pPr marL="342900" indent="-342900">
+              <a:lnSpc>
+                <a:spcPct val="200000"/>
+              </a:lnSpc>
+              <a:buFont typeface="Arial" panose="020B0604020202020204" pitchFamily="34" charset="0"/>
+              <a:buChar char="•"/>
+            </a:pPr>
+            <a:r>
               <a:rPr lang="en-US" sz="2400" dirty="0"/>
-              <a:t>Example slide body.</a:t>
+              <a:t>Cars yield to pedestrians</a:t>
+            </a:r>
+          </a:p>
+          <a:p>
+            <a:pPr marL="342900" indent="-342900">
+              <a:lnSpc>
+                <a:spcPct val="200000"/>
+              </a:lnSpc>
+              <a:buFont typeface="Arial" panose="020B0604020202020204" pitchFamily="34" charset="0"/>
+              <a:buChar char="•"/>
+            </a:pPr>
+            <a:r>
+              <a:rPr lang="en-US" sz="2400" dirty="0"/>
+              <a:t>Crosswalks with pedestrian volume</a:t>
+            </a:r>
+          </a:p>
+          <a:p>
+            <a:pPr marL="342900" indent="-342900">
+              <a:lnSpc>
+                <a:spcPct val="200000"/>
+              </a:lnSpc>
+              <a:buFont typeface="Arial" panose="020B0604020202020204" pitchFamily="34" charset="0"/>
+              <a:buChar char="•"/>
+            </a:pPr>
+            <a:r>
+              <a:rPr lang="en-US" sz="2400" dirty="0"/>
+              <a:t>Busier crosswalk leading to longer queues for turning cars</a:t>
             </a:r>
           </a:p>
         </p:txBody>
@@ -10354,7 +10881,7 @@
     </p:spTree>
     <p:extLst>
       <p:ext uri="{BB962C8B-B14F-4D97-AF65-F5344CB8AC3E}">
-        <p14:creationId xmlns:p14="http://schemas.microsoft.com/office/powerpoint/2010/main" val="2043908860"/>
+        <p14:creationId xmlns:p14="http://schemas.microsoft.com/office/powerpoint/2010/main" val="3291835256"/>
       </p:ext>
     </p:extLst>
   </p:cSld>
